--- a/03-build/pptx/C4_U4_alumno.pptx
+++ b/03-build/pptx/C4_U4_alumno.pptx
@@ -4204,7 +4204,6 @@
               <a:srgbClr val="D64550"/>
             </a:solidFill>
           </a:ln>
-          <a:effectLst/>
           <a:effectLst>
             <a:outerShdw blurRad="90000" dist="38000" dir="5400000" rotWithShape="0">
               <a:srgbClr val="20242E">
@@ -4392,7 +4391,6 @@
               <a:srgbClr val="E4E3DE"/>
             </a:solidFill>
           </a:ln>
-          <a:effectLst/>
           <a:effectLst>
             <a:outerShdw blurRad="90000" dist="38000" dir="5400000" rotWithShape="0">
               <a:srgbClr val="20242E">
@@ -5117,7 +5115,6 @@
               <a:srgbClr val="E4E3DE"/>
             </a:solidFill>
           </a:ln>
-          <a:effectLst/>
           <a:effectLst>
             <a:outerShdw blurRad="90000" dist="38000" dir="5400000" rotWithShape="0">
               <a:srgbClr val="20242E">
@@ -5261,7 +5258,6 @@
               <a:srgbClr val="E4E3DE"/>
             </a:solidFill>
           </a:ln>
-          <a:effectLst/>
           <a:effectLst>
             <a:outerShdw blurRad="90000" dist="38000" dir="5400000" rotWithShape="0">
               <a:srgbClr val="20242E">
@@ -5405,7 +5401,6 @@
               <a:srgbClr val="E4E3DE"/>
             </a:solidFill>
           </a:ln>
-          <a:effectLst/>
           <a:effectLst>
             <a:outerShdw blurRad="90000" dist="38000" dir="5400000" rotWithShape="0">
               <a:srgbClr val="20242E">
@@ -5549,7 +5544,6 @@
               <a:srgbClr val="E4E3DE"/>
             </a:solidFill>
           </a:ln>
-          <a:effectLst/>
           <a:effectLst>
             <a:outerShdw blurRad="90000" dist="38000" dir="5400000" rotWithShape="0">
               <a:srgbClr val="20242E">
@@ -5693,7 +5687,6 @@
               <a:srgbClr val="E4E3DE"/>
             </a:solidFill>
           </a:ln>
-          <a:effectLst/>
           <a:effectLst>
             <a:outerShdw blurRad="90000" dist="38000" dir="5400000" rotWithShape="0">
               <a:srgbClr val="20242E">
@@ -5837,7 +5830,6 @@
               <a:srgbClr val="E4E3DE"/>
             </a:solidFill>
           </a:ln>
-          <a:effectLst/>
           <a:effectLst>
             <a:outerShdw blurRad="90000" dist="38000" dir="5400000" rotWithShape="0">
               <a:srgbClr val="20242E">
@@ -5981,7 +5973,6 @@
               <a:srgbClr val="D64550"/>
             </a:solidFill>
           </a:ln>
-          <a:effectLst/>
           <a:effectLst>
             <a:outerShdw blurRad="90000" dist="38000" dir="5400000" rotWithShape="0">
               <a:srgbClr val="20242E">
@@ -6618,7 +6609,6 @@
               <a:srgbClr val="D64550"/>
             </a:solidFill>
           </a:ln>
-          <a:effectLst/>
           <a:effectLst>
             <a:outerShdw blurRad="90000" dist="38000" dir="5400000" rotWithShape="0">
               <a:srgbClr val="20242E">
@@ -6878,7 +6868,6 @@
               <a:srgbClr val="D64550"/>
             </a:solidFill>
           </a:ln>
-          <a:effectLst/>
           <a:effectLst>
             <a:outerShdw blurRad="90000" dist="38000" dir="5400000" rotWithShape="0">
               <a:srgbClr val="20242E">
@@ -7657,7 +7646,6 @@
               <a:srgbClr val="E4E3DE"/>
             </a:solidFill>
           </a:ln>
-          <a:effectLst/>
           <a:effectLst>
             <a:outerShdw blurRad="90000" dist="38000" dir="5400000" rotWithShape="0">
               <a:srgbClr val="20242E">
@@ -7811,7 +7799,6 @@
               <a:srgbClr val="D64550"/>
             </a:solidFill>
           </a:ln>
-          <a:effectLst/>
           <a:effectLst>
             <a:outerShdw blurRad="90000" dist="38000" dir="5400000" rotWithShape="0">
               <a:srgbClr val="20242E">
@@ -7965,7 +7952,6 @@
               <a:srgbClr val="E4E3DE"/>
             </a:solidFill>
           </a:ln>
-          <a:effectLst/>
           <a:effectLst>
             <a:outerShdw blurRad="90000" dist="38000" dir="5400000" rotWithShape="0">
               <a:srgbClr val="20242E">
@@ -8119,7 +8105,6 @@
               <a:srgbClr val="E4E3DE"/>
             </a:solidFill>
           </a:ln>
-          <a:effectLst/>
           <a:effectLst>
             <a:outerShdw blurRad="90000" dist="38000" dir="5400000" rotWithShape="0">
               <a:srgbClr val="20242E">
@@ -8273,7 +8258,6 @@
               <a:srgbClr val="E4E3DE"/>
             </a:solidFill>
           </a:ln>
-          <a:effectLst/>
           <a:effectLst>
             <a:outerShdw blurRad="90000" dist="38000" dir="5400000" rotWithShape="0">
               <a:srgbClr val="20242E">
@@ -8427,7 +8411,6 @@
               <a:srgbClr val="E4E3DE"/>
             </a:solidFill>
           </a:ln>
-          <a:effectLst/>
           <a:effectLst>
             <a:outerShdw blurRad="90000" dist="38000" dir="5400000" rotWithShape="0">
               <a:srgbClr val="20242E">
@@ -8581,7 +8564,6 @@
               <a:srgbClr val="E4E3DE"/>
             </a:solidFill>
           </a:ln>
-          <a:effectLst/>
           <a:effectLst>
             <a:outerShdw blurRad="90000" dist="38000" dir="5400000" rotWithShape="0">
               <a:srgbClr val="20242E">
@@ -8735,7 +8717,6 @@
               <a:srgbClr val="E4E3DE"/>
             </a:solidFill>
           </a:ln>
-          <a:effectLst/>
           <a:effectLst>
             <a:outerShdw blurRad="90000" dist="38000" dir="5400000" rotWithShape="0">
               <a:srgbClr val="20242E">
@@ -8889,7 +8870,6 @@
               <a:srgbClr val="D64550"/>
             </a:solidFill>
           </a:ln>
-          <a:effectLst/>
           <a:effectLst>
             <a:outerShdw blurRad="90000" dist="38000" dir="5400000" rotWithShape="0">
               <a:srgbClr val="20242E">
@@ -9043,7 +9023,6 @@
               <a:srgbClr val="D64550"/>
             </a:solidFill>
           </a:ln>
-          <a:effectLst/>
           <a:effectLst>
             <a:outerShdw blurRad="90000" dist="38000" dir="5400000" rotWithShape="0">
               <a:srgbClr val="20242E">
@@ -9680,7 +9659,6 @@
               <a:srgbClr val="E4E3DE"/>
             </a:solidFill>
           </a:ln>
-          <a:effectLst/>
           <a:effectLst>
             <a:outerShdw blurRad="90000" dist="38000" dir="5400000" rotWithShape="0">
               <a:srgbClr val="20242E">
@@ -9934,7 +9912,6 @@
               <a:srgbClr val="D64550"/>
             </a:solidFill>
           </a:ln>
-          <a:effectLst/>
           <a:effectLst>
             <a:outerShdw blurRad="90000" dist="38000" dir="5400000" rotWithShape="0">
               <a:srgbClr val="20242E">
@@ -10802,7 +10779,6 @@
               <a:srgbClr val="E4E3DE"/>
             </a:solidFill>
           </a:ln>
-          <a:effectLst/>
           <a:effectLst>
             <a:outerShdw blurRad="90000" dist="38000" dir="5400000" rotWithShape="0">
               <a:srgbClr val="20242E">
@@ -10971,7 +10947,6 @@
               <a:srgbClr val="E4E3DE"/>
             </a:solidFill>
           </a:ln>
-          <a:effectLst/>
           <a:effectLst>
             <a:outerShdw blurRad="90000" dist="38000" dir="5400000" rotWithShape="0">
               <a:srgbClr val="20242E">
@@ -11140,7 +11115,6 @@
               <a:srgbClr val="E4E3DE"/>
             </a:solidFill>
           </a:ln>
-          <a:effectLst/>
           <a:effectLst>
             <a:outerShdw blurRad="90000" dist="38000" dir="5400000" rotWithShape="0">
               <a:srgbClr val="20242E">
@@ -11309,7 +11283,6 @@
               <a:srgbClr val="E4E3DE"/>
             </a:solidFill>
           </a:ln>
-          <a:effectLst/>
           <a:effectLst>
             <a:outerShdw blurRad="90000" dist="38000" dir="5400000" rotWithShape="0">
               <a:srgbClr val="20242E">
@@ -11478,7 +11451,6 @@
               <a:srgbClr val="E4E3DE"/>
             </a:solidFill>
           </a:ln>
-          <a:effectLst/>
           <a:effectLst>
             <a:outerShdw blurRad="90000" dist="38000" dir="5400000" rotWithShape="0">
               <a:srgbClr val="20242E">
@@ -11647,7 +11619,6 @@
               <a:srgbClr val="E4E3DE"/>
             </a:solidFill>
           </a:ln>
-          <a:effectLst/>
           <a:effectLst>
             <a:outerShdw blurRad="90000" dist="38000" dir="5400000" rotWithShape="0">
               <a:srgbClr val="20242E">
@@ -11816,7 +11787,6 @@
               <a:srgbClr val="E4E3DE"/>
             </a:solidFill>
           </a:ln>
-          <a:effectLst/>
           <a:effectLst>
             <a:outerShdw blurRad="90000" dist="38000" dir="5400000" rotWithShape="0">
               <a:srgbClr val="20242E">
@@ -11985,7 +11955,6 @@
               <a:srgbClr val="E4E3DE"/>
             </a:solidFill>
           </a:ln>
-          <a:effectLst/>
           <a:effectLst>
             <a:outerShdw blurRad="90000" dist="38000" dir="5400000" rotWithShape="0">
               <a:srgbClr val="20242E">
@@ -12154,7 +12123,6 @@
               <a:srgbClr val="E4E3DE"/>
             </a:solidFill>
           </a:ln>
-          <a:effectLst/>
           <a:effectLst>
             <a:outerShdw blurRad="90000" dist="38000" dir="5400000" rotWithShape="0">
               <a:srgbClr val="20242E">
@@ -12903,7 +12871,6 @@
               <a:srgbClr val="E4E3DE"/>
             </a:solidFill>
           </a:ln>
-          <a:effectLst/>
           <a:effectLst>
             <a:outerShdw blurRad="90000" dist="38000" dir="5400000" rotWithShape="0">
               <a:srgbClr val="20242E">
@@ -13758,7 +13725,6 @@
               <a:srgbClr val="D64550"/>
             </a:solidFill>
           </a:ln>
-          <a:effectLst/>
           <a:effectLst>
             <a:outerShdw blurRad="90000" dist="38000" dir="5400000" rotWithShape="0">
               <a:srgbClr val="20242E">
@@ -14507,7 +14473,6 @@
               <a:srgbClr val="E4E3DE"/>
             </a:solidFill>
           </a:ln>
-          <a:effectLst/>
           <a:effectLst>
             <a:outerShdw blurRad="90000" dist="38000" dir="5400000" rotWithShape="0">
               <a:srgbClr val="20242E">
@@ -14718,7 +14683,6 @@
               <a:srgbClr val="E4E3DE"/>
             </a:solidFill>
           </a:ln>
-          <a:effectLst/>
           <a:effectLst>
             <a:outerShdw blurRad="90000" dist="38000" dir="5400000" rotWithShape="0">
               <a:srgbClr val="20242E">
@@ -14929,7 +14893,6 @@
               <a:srgbClr val="D64550"/>
             </a:solidFill>
           </a:ln>
-          <a:effectLst/>
           <a:effectLst>
             <a:outerShdw blurRad="90000" dist="38000" dir="5400000" rotWithShape="0">
               <a:srgbClr val="20242E">
@@ -15818,7 +15781,6 @@
               <a:srgbClr val="E4E3DE"/>
             </a:solidFill>
           </a:ln>
-          <a:effectLst/>
           <a:effectLst>
             <a:outerShdw blurRad="90000" dist="38000" dir="5400000" rotWithShape="0">
               <a:srgbClr val="20242E">
@@ -16188,7 +16150,6 @@
               <a:srgbClr val="E4E3DE"/>
             </a:solidFill>
           </a:ln>
-          <a:effectLst/>
           <a:effectLst>
             <a:outerShdw blurRad="90000" dist="38000" dir="5400000" rotWithShape="0">
               <a:srgbClr val="20242E">
@@ -16558,7 +16519,6 @@
               <a:srgbClr val="E4E3DE"/>
             </a:solidFill>
           </a:ln>
-          <a:effectLst/>
           <a:effectLst>
             <a:outerShdw blurRad="90000" dist="38000" dir="5400000" rotWithShape="0">
               <a:srgbClr val="20242E">
@@ -17456,7 +17416,6 @@
               <a:srgbClr val="D64550"/>
             </a:solidFill>
           </a:ln>
-          <a:effectLst/>
           <a:effectLst>
             <a:outerShdw blurRad="90000" dist="38000" dir="5400000" rotWithShape="0">
               <a:srgbClr val="20242E">
@@ -17826,7 +17785,6 @@
               <a:srgbClr val="E4E3DE"/>
             </a:solidFill>
           </a:ln>
-          <a:effectLst/>
           <a:effectLst>
             <a:outerShdw blurRad="90000" dist="38000" dir="5400000" rotWithShape="0">
               <a:srgbClr val="20242E">
@@ -19278,7 +19236,6 @@
               <a:srgbClr val="E4E3DE"/>
             </a:solidFill>
           </a:ln>
-          <a:effectLst/>
           <a:effectLst>
             <a:outerShdw blurRad="90000" dist="38000" dir="5400000" rotWithShape="0">
               <a:srgbClr val="20242E">
@@ -19567,7 +19524,6 @@
               <a:srgbClr val="E4E3DE"/>
             </a:solidFill>
           </a:ln>
-          <a:effectLst/>
           <a:effectLst>
             <a:outerShdw blurRad="90000" dist="38000" dir="5400000" rotWithShape="0">
               <a:srgbClr val="20242E">
@@ -19883,7 +19839,6 @@
               <a:srgbClr val="D64550"/>
             </a:solidFill>
           </a:ln>
-          <a:effectLst/>
           <a:effectLst>
             <a:outerShdw blurRad="90000" dist="38000" dir="5400000" rotWithShape="0">
               <a:srgbClr val="20242E">
@@ -20996,7 +20951,6 @@
               <a:srgbClr val="E4E3DE"/>
             </a:solidFill>
           </a:ln>
-          <a:effectLst/>
           <a:effectLst>
             <a:outerShdw blurRad="90000" dist="38000" dir="5400000" rotWithShape="0">
               <a:srgbClr val="20242E">
@@ -21140,7 +21094,6 @@
               <a:srgbClr val="E4E3DE"/>
             </a:solidFill>
           </a:ln>
-          <a:effectLst/>
           <a:effectLst>
             <a:outerShdw blurRad="90000" dist="38000" dir="5400000" rotWithShape="0">
               <a:srgbClr val="20242E">
@@ -21284,7 +21237,6 @@
               <a:srgbClr val="E4E3DE"/>
             </a:solidFill>
           </a:ln>
-          <a:effectLst/>
           <a:effectLst>
             <a:outerShdw blurRad="90000" dist="38000" dir="5400000" rotWithShape="0">
               <a:srgbClr val="20242E">
@@ -22037,7 +21989,6 @@
               <a:srgbClr val="E4E3DE"/>
             </a:solidFill>
           </a:ln>
-          <a:effectLst/>
           <a:effectLst>
             <a:outerShdw blurRad="90000" dist="38000" dir="5400000" rotWithShape="0">
               <a:srgbClr val="20242E">
